--- a/probability_and_statistics/4_probability_distribution/Stats-PDF-3-Discrete-Binomial.pptx
+++ b/probability_and_statistics/4_probability_distribution/Stats-PDF-3-Discrete-Binomial.pptx
@@ -228,7 +228,7 @@
           <a:p>
             <a:fld id="{7BAEECA8-D063-486F-AE31-5020270C1449}" type="datetimeFigureOut">
               <a:rPr lang="en-US" smtClean="0"/>
-              <a:t>3/1/2026</a:t>
+              <a:t>4/6/2026</a:t>
             </a:fld>
             <a:endParaRPr lang="en-US"/>
           </a:p>
@@ -470,7 +470,7 @@
           <a:p>
             <a:fld id="{6383FAE1-13DE-4511-8C1B-C8AFB720664C}" type="datetimeFigureOut">
               <a:rPr lang="en-US" smtClean="0"/>
-              <a:t>3/1/2026</a:t>
+              <a:t>4/6/2026</a:t>
             </a:fld>
             <a:endParaRPr lang="en-US"/>
           </a:p>
@@ -668,7 +668,7 @@
           <a:p>
             <a:fld id="{6383FAE1-13DE-4511-8C1B-C8AFB720664C}" type="datetimeFigureOut">
               <a:rPr lang="en-US" smtClean="0"/>
-              <a:t>3/1/2026</a:t>
+              <a:t>4/6/2026</a:t>
             </a:fld>
             <a:endParaRPr lang="en-US"/>
           </a:p>
@@ -876,7 +876,7 @@
           <a:p>
             <a:fld id="{6383FAE1-13DE-4511-8C1B-C8AFB720664C}" type="datetimeFigureOut">
               <a:rPr lang="en-US" smtClean="0"/>
-              <a:t>3/1/2026</a:t>
+              <a:t>4/6/2026</a:t>
             </a:fld>
             <a:endParaRPr lang="en-US"/>
           </a:p>
@@ -1074,7 +1074,7 @@
           <a:p>
             <a:fld id="{6383FAE1-13DE-4511-8C1B-C8AFB720664C}" type="datetimeFigureOut">
               <a:rPr lang="en-US" smtClean="0"/>
-              <a:t>3/1/2026</a:t>
+              <a:t>4/6/2026</a:t>
             </a:fld>
             <a:endParaRPr lang="en-US"/>
           </a:p>
@@ -1349,7 +1349,7 @@
           <a:p>
             <a:fld id="{6383FAE1-13DE-4511-8C1B-C8AFB720664C}" type="datetimeFigureOut">
               <a:rPr lang="en-US" smtClean="0"/>
-              <a:t>3/1/2026</a:t>
+              <a:t>4/6/2026</a:t>
             </a:fld>
             <a:endParaRPr lang="en-US"/>
           </a:p>
@@ -1614,7 +1614,7 @@
           <a:p>
             <a:fld id="{6383FAE1-13DE-4511-8C1B-C8AFB720664C}" type="datetimeFigureOut">
               <a:rPr lang="en-US" smtClean="0"/>
-              <a:t>3/1/2026</a:t>
+              <a:t>4/6/2026</a:t>
             </a:fld>
             <a:endParaRPr lang="en-US"/>
           </a:p>
@@ -2026,7 +2026,7 @@
           <a:p>
             <a:fld id="{6383FAE1-13DE-4511-8C1B-C8AFB720664C}" type="datetimeFigureOut">
               <a:rPr lang="en-US" smtClean="0"/>
-              <a:t>3/1/2026</a:t>
+              <a:t>4/6/2026</a:t>
             </a:fld>
             <a:endParaRPr lang="en-US"/>
           </a:p>
@@ -2167,7 +2167,7 @@
           <a:p>
             <a:fld id="{6383FAE1-13DE-4511-8C1B-C8AFB720664C}" type="datetimeFigureOut">
               <a:rPr lang="en-US" smtClean="0"/>
-              <a:t>3/1/2026</a:t>
+              <a:t>4/6/2026</a:t>
             </a:fld>
             <a:endParaRPr lang="en-US"/>
           </a:p>
@@ -2280,7 +2280,7 @@
           <a:p>
             <a:fld id="{6383FAE1-13DE-4511-8C1B-C8AFB720664C}" type="datetimeFigureOut">
               <a:rPr lang="en-US" smtClean="0"/>
-              <a:t>3/1/2026</a:t>
+              <a:t>4/6/2026</a:t>
             </a:fld>
             <a:endParaRPr lang="en-US"/>
           </a:p>
@@ -2591,7 +2591,7 @@
           <a:p>
             <a:fld id="{6383FAE1-13DE-4511-8C1B-C8AFB720664C}" type="datetimeFigureOut">
               <a:rPr lang="en-US" smtClean="0"/>
-              <a:t>3/1/2026</a:t>
+              <a:t>4/6/2026</a:t>
             </a:fld>
             <a:endParaRPr lang="en-US"/>
           </a:p>
@@ -2882,7 +2882,7 @@
           <a:p>
             <a:fld id="{6383FAE1-13DE-4511-8C1B-C8AFB720664C}" type="datetimeFigureOut">
               <a:rPr lang="en-US" smtClean="0"/>
-              <a:t>3/1/2026</a:t>
+              <a:t>4/6/2026</a:t>
             </a:fld>
             <a:endParaRPr lang="en-US"/>
           </a:p>
@@ -3126,7 +3126,7 @@
           <a:p>
             <a:fld id="{6383FAE1-13DE-4511-8C1B-C8AFB720664C}" type="datetimeFigureOut">
               <a:rPr lang="en-US" smtClean="0"/>
-              <a:t>3/1/2026</a:t>
+              <a:t>4/6/2026</a:t>
             </a:fld>
             <a:endParaRPr lang="en-US"/>
           </a:p>
@@ -3886,7 +3886,18 @@
                   </a:schemeClr>
                 </a:solidFill>
               </a:rPr>
-              <a:t>You toss a coin 4 times and success is getting head.</a:t>
+              <a:t>You toss a coin 4 times and </a:t>
+            </a:r>
+            <a:r>
+              <a:rPr lang="en-US" sz="2400" b="1" u="sng" dirty="0">
+                <a:solidFill>
+                  <a:schemeClr val="accent6">
+                    <a:lumMod val="60000"/>
+                    <a:lumOff val="40000"/>
+                  </a:schemeClr>
+                </a:solidFill>
+              </a:rPr>
+              <a:t>success is getting head.</a:t>
             </a:r>
           </a:p>
           <a:p>
@@ -4220,7 +4231,7 @@
         </p:blipFill>
         <p:spPr>
           <a:xfrm>
-            <a:off x="180478" y="857083"/>
+            <a:off x="463942" y="857083"/>
             <a:ext cx="8570330" cy="5667054"/>
           </a:xfrm>
           <a:prstGeom prst="rect">
@@ -4977,8 +4988,8 @@
           <a:chExt cx="0" cy="0"/>
         </a:xfrm>
       </p:grpSpPr>
-      <mc:AlternateContent xmlns:mc="http://schemas.openxmlformats.org/markup-compatibility/2006">
-        <mc:Choice xmlns:a14="http://schemas.microsoft.com/office/drawing/2010/main" Requires="a14">
+      <mc:AlternateContent xmlns:mc="http://schemas.openxmlformats.org/markup-compatibility/2006" xmlns:a14="http://schemas.microsoft.com/office/drawing/2010/main">
+        <mc:Choice Requires="a14">
           <p:sp>
             <p:nvSpPr>
               <p:cNvPr id="7" name="TextBox 6">
@@ -5237,7 +5248,7 @@
             </p:txBody>
           </p:sp>
         </mc:Choice>
-        <mc:Fallback>
+        <mc:Fallback xmlns="">
           <p:sp>
             <p:nvSpPr>
               <p:cNvPr id="7" name="TextBox 6">
@@ -5368,7 +5379,18 @@
                   </a:schemeClr>
                 </a:solidFill>
               </a:rPr>
-              <a:t>You pick 4 random emails from inbox and success is getting spam.</a:t>
+              <a:t>You pick 4 random emails from inbox and </a:t>
+            </a:r>
+            <a:r>
+              <a:rPr lang="en-US" sz="2400" b="1" u="sng" dirty="0">
+                <a:solidFill>
+                  <a:schemeClr val="accent6">
+                    <a:lumMod val="60000"/>
+                    <a:lumOff val="40000"/>
+                  </a:schemeClr>
+                </a:solidFill>
+              </a:rPr>
+              <a:t>success is getting spam.</a:t>
             </a:r>
           </a:p>
           <a:p>
@@ -5802,8 +5824,8 @@
         </p:nvSpPr>
         <p:spPr>
           <a:xfrm>
-            <a:off x="96012" y="671959"/>
-            <a:ext cx="11937492" cy="3785652"/>
+            <a:off x="96012" y="607951"/>
+            <a:ext cx="11937492" cy="5262979"/>
           </a:xfrm>
           <a:prstGeom prst="rect">
             <a:avLst/>
@@ -5838,7 +5860,20 @@
                   </a:schemeClr>
                 </a:solidFill>
               </a:rPr>
-              <a:t>You pick 4 random items from an assembly line for inspection. Success is getting defective piece.</a:t>
+              <a:t>You pick 4 random items from an assembly line for inspection.</a:t>
+            </a:r>
+          </a:p>
+          <a:p>
+            <a:r>
+              <a:rPr lang="en-US" sz="2400" b="1" u="sng" dirty="0">
+                <a:solidFill>
+                  <a:schemeClr val="accent6">
+                    <a:lumMod val="60000"/>
+                    <a:lumOff val="40000"/>
+                  </a:schemeClr>
+                </a:solidFill>
+              </a:rPr>
+              <a:t>Success is getting defective piece.</a:t>
             </a:r>
           </a:p>
           <a:p>
@@ -5897,6 +5932,20 @@
               <a:buFont typeface="Arial" panose="020B0604020202020204" pitchFamily="34" charset="0"/>
               <a:buChar char="•"/>
             </a:pPr>
+            <a:endParaRPr lang="en-US" sz="2400" dirty="0">
+              <a:solidFill>
+                <a:schemeClr val="accent6">
+                  <a:lumMod val="60000"/>
+                  <a:lumOff val="40000"/>
+                </a:schemeClr>
+              </a:solidFill>
+            </a:endParaRPr>
+          </a:p>
+          <a:p>
+            <a:pPr marL="800100" lvl="1" indent="-342900">
+              <a:buFont typeface="Arial" panose="020B0604020202020204" pitchFamily="34" charset="0"/>
+              <a:buChar char="•"/>
+            </a:pPr>
             <a:r>
               <a:rPr lang="en-US" sz="2400" dirty="0">
                 <a:solidFill>
@@ -5914,6 +5963,20 @@
               <a:buFont typeface="Arial" panose="020B0604020202020204" pitchFamily="34" charset="0"/>
               <a:buChar char="•"/>
             </a:pPr>
+            <a:endParaRPr lang="en-US" sz="2400" dirty="0">
+              <a:solidFill>
+                <a:schemeClr val="accent6">
+                  <a:lumMod val="60000"/>
+                  <a:lumOff val="40000"/>
+                </a:schemeClr>
+              </a:solidFill>
+            </a:endParaRPr>
+          </a:p>
+          <a:p>
+            <a:pPr marL="800100" lvl="1" indent="-342900">
+              <a:buFont typeface="Arial" panose="020B0604020202020204" pitchFamily="34" charset="0"/>
+              <a:buChar char="•"/>
+            </a:pPr>
             <a:r>
               <a:rPr lang="en-US" sz="2400" dirty="0">
                 <a:solidFill>
@@ -5931,6 +5994,20 @@
               <a:buFont typeface="Arial" panose="020B0604020202020204" pitchFamily="34" charset="0"/>
               <a:buChar char="•"/>
             </a:pPr>
+            <a:endParaRPr lang="en-US" sz="2400" dirty="0">
+              <a:solidFill>
+                <a:schemeClr val="accent6">
+                  <a:lumMod val="60000"/>
+                  <a:lumOff val="40000"/>
+                </a:schemeClr>
+              </a:solidFill>
+            </a:endParaRPr>
+          </a:p>
+          <a:p>
+            <a:pPr marL="800100" lvl="1" indent="-342900">
+              <a:buFont typeface="Arial" panose="020B0604020202020204" pitchFamily="34" charset="0"/>
+              <a:buChar char="•"/>
+            </a:pPr>
             <a:r>
               <a:rPr lang="en-US" sz="2400" dirty="0">
                 <a:solidFill>
@@ -5942,6 +6019,20 @@
               </a:rPr>
               <a:t>3 success    - &gt;3 defect</a:t>
             </a:r>
+          </a:p>
+          <a:p>
+            <a:pPr marL="800100" lvl="1" indent="-342900">
+              <a:buFont typeface="Arial" panose="020B0604020202020204" pitchFamily="34" charset="0"/>
+              <a:buChar char="•"/>
+            </a:pPr>
+            <a:endParaRPr lang="en-US" sz="2400" dirty="0">
+              <a:solidFill>
+                <a:schemeClr val="accent6">
+                  <a:lumMod val="60000"/>
+                  <a:lumOff val="40000"/>
+                </a:schemeClr>
+              </a:solidFill>
+            </a:endParaRPr>
           </a:p>
           <a:p>
             <a:pPr marL="800100" lvl="1" indent="-342900">
@@ -6048,7 +6139,7 @@
         </p:nvSpPr>
         <p:spPr>
           <a:xfrm>
-            <a:off x="7241458" y="3641385"/>
+            <a:off x="7241458" y="4811817"/>
             <a:ext cx="1093401" cy="640080"/>
           </a:xfrm>
           <a:prstGeom prst="rect">
@@ -6095,7 +6186,7 @@
         </p:nvSpPr>
         <p:spPr>
           <a:xfrm>
-            <a:off x="5912530" y="3629193"/>
+            <a:off x="5912530" y="4799625"/>
             <a:ext cx="1093401" cy="640080"/>
           </a:xfrm>
           <a:prstGeom prst="rect">
@@ -6142,7 +6233,7 @@
         </p:nvSpPr>
         <p:spPr>
           <a:xfrm>
-            <a:off x="4565314" y="3607857"/>
+            <a:off x="4565314" y="4778289"/>
             <a:ext cx="1093401" cy="640080"/>
           </a:xfrm>
           <a:prstGeom prst="rect">
@@ -6189,7 +6280,571 @@
         </p:nvSpPr>
         <p:spPr>
           <a:xfrm>
-            <a:off x="8564290" y="3647481"/>
+            <a:off x="8564290" y="4817913"/>
+            <a:ext cx="1093401" cy="640080"/>
+          </a:xfrm>
+          <a:prstGeom prst="rect">
+            <a:avLst/>
+          </a:prstGeom>
+        </p:spPr>
+        <p:style>
+          <a:lnRef idx="1">
+            <a:schemeClr val="accent5"/>
+          </a:lnRef>
+          <a:fillRef idx="2">
+            <a:schemeClr val="accent5"/>
+          </a:fillRef>
+          <a:effectRef idx="1">
+            <a:schemeClr val="accent5"/>
+          </a:effectRef>
+          <a:fontRef idx="minor">
+            <a:schemeClr val="dk1"/>
+          </a:fontRef>
+        </p:style>
+        <p:txBody>
+          <a:bodyPr rtlCol="0" anchor="ctr"/>
+          <a:lstStyle/>
+          <a:p>
+            <a:pPr algn="ctr"/>
+            <a:r>
+              <a:rPr lang="en-US" dirty="0"/>
+              <a:t>Non-Defect</a:t>
+            </a:r>
+          </a:p>
+        </p:txBody>
+      </p:sp>
+      <p:sp>
+        <p:nvSpPr>
+          <p:cNvPr id="4" name="Rectangle 3">
+            <a:extLst>
+              <a:ext uri="{FF2B5EF4-FFF2-40B4-BE49-F238E27FC236}">
+                <a16:creationId xmlns:a16="http://schemas.microsoft.com/office/drawing/2014/main" id="{14B5727D-5115-CB91-B04B-DA3182D162FF}"/>
+              </a:ext>
+            </a:extLst>
+          </p:cNvPr>
+          <p:cNvSpPr/>
+          <p:nvPr/>
+        </p:nvSpPr>
+        <p:spPr>
+          <a:xfrm>
+            <a:off x="5912530" y="3898834"/>
+            <a:ext cx="1093401" cy="640080"/>
+          </a:xfrm>
+          <a:prstGeom prst="rect">
+            <a:avLst/>
+          </a:prstGeom>
+        </p:spPr>
+        <p:style>
+          <a:lnRef idx="1">
+            <a:schemeClr val="accent2"/>
+          </a:lnRef>
+          <a:fillRef idx="2">
+            <a:schemeClr val="accent2"/>
+          </a:fillRef>
+          <a:effectRef idx="1">
+            <a:schemeClr val="accent2"/>
+          </a:effectRef>
+          <a:fontRef idx="minor">
+            <a:schemeClr val="dk1"/>
+          </a:fontRef>
+        </p:style>
+        <p:txBody>
+          <a:bodyPr rtlCol="0" anchor="ctr"/>
+          <a:lstStyle/>
+          <a:p>
+            <a:pPr algn="ctr"/>
+            <a:r>
+              <a:rPr lang="en-US" dirty="0"/>
+              <a:t>Defect</a:t>
+            </a:r>
+          </a:p>
+        </p:txBody>
+      </p:sp>
+      <p:sp>
+        <p:nvSpPr>
+          <p:cNvPr id="5" name="Rectangle 4">
+            <a:extLst>
+              <a:ext uri="{FF2B5EF4-FFF2-40B4-BE49-F238E27FC236}">
+                <a16:creationId xmlns:a16="http://schemas.microsoft.com/office/drawing/2014/main" id="{57E590E3-A51C-DD36-180A-538764C306A1}"/>
+              </a:ext>
+            </a:extLst>
+          </p:cNvPr>
+          <p:cNvSpPr/>
+          <p:nvPr/>
+        </p:nvSpPr>
+        <p:spPr>
+          <a:xfrm>
+            <a:off x="4565314" y="3877498"/>
+            <a:ext cx="1093401" cy="640080"/>
+          </a:xfrm>
+          <a:prstGeom prst="rect">
+            <a:avLst/>
+          </a:prstGeom>
+        </p:spPr>
+        <p:style>
+          <a:lnRef idx="1">
+            <a:schemeClr val="accent2"/>
+          </a:lnRef>
+          <a:fillRef idx="2">
+            <a:schemeClr val="accent2"/>
+          </a:fillRef>
+          <a:effectRef idx="1">
+            <a:schemeClr val="accent2"/>
+          </a:effectRef>
+          <a:fontRef idx="minor">
+            <a:schemeClr val="dk1"/>
+          </a:fontRef>
+        </p:style>
+        <p:txBody>
+          <a:bodyPr rtlCol="0" anchor="ctr"/>
+          <a:lstStyle/>
+          <a:p>
+            <a:pPr algn="ctr"/>
+            <a:r>
+              <a:rPr lang="en-US" dirty="0"/>
+              <a:t>Defect</a:t>
+            </a:r>
+          </a:p>
+        </p:txBody>
+      </p:sp>
+      <p:sp>
+        <p:nvSpPr>
+          <p:cNvPr id="6" name="Rectangle 5">
+            <a:extLst>
+              <a:ext uri="{FF2B5EF4-FFF2-40B4-BE49-F238E27FC236}">
+                <a16:creationId xmlns:a16="http://schemas.microsoft.com/office/drawing/2014/main" id="{D067E19E-D4E9-003E-4124-51589F873F4A}"/>
+              </a:ext>
+            </a:extLst>
+          </p:cNvPr>
+          <p:cNvSpPr/>
+          <p:nvPr/>
+        </p:nvSpPr>
+        <p:spPr>
+          <a:xfrm>
+            <a:off x="7288805" y="3898834"/>
+            <a:ext cx="1093401" cy="640080"/>
+          </a:xfrm>
+          <a:prstGeom prst="rect">
+            <a:avLst/>
+          </a:prstGeom>
+        </p:spPr>
+        <p:style>
+          <a:lnRef idx="1">
+            <a:schemeClr val="accent5"/>
+          </a:lnRef>
+          <a:fillRef idx="2">
+            <a:schemeClr val="accent5"/>
+          </a:fillRef>
+          <a:effectRef idx="1">
+            <a:schemeClr val="accent5"/>
+          </a:effectRef>
+          <a:fontRef idx="minor">
+            <a:schemeClr val="dk1"/>
+          </a:fontRef>
+        </p:style>
+        <p:txBody>
+          <a:bodyPr rtlCol="0" anchor="ctr"/>
+          <a:lstStyle/>
+          <a:p>
+            <a:pPr algn="ctr"/>
+            <a:r>
+              <a:rPr lang="en-US" dirty="0"/>
+              <a:t>Non-Defect</a:t>
+            </a:r>
+          </a:p>
+        </p:txBody>
+      </p:sp>
+      <p:sp>
+        <p:nvSpPr>
+          <p:cNvPr id="7" name="Rectangle 6">
+            <a:extLst>
+              <a:ext uri="{FF2B5EF4-FFF2-40B4-BE49-F238E27FC236}">
+                <a16:creationId xmlns:a16="http://schemas.microsoft.com/office/drawing/2014/main" id="{3144323F-E018-2566-6D7D-7F42CC34D267}"/>
+              </a:ext>
+            </a:extLst>
+          </p:cNvPr>
+          <p:cNvSpPr/>
+          <p:nvPr/>
+        </p:nvSpPr>
+        <p:spPr>
+          <a:xfrm>
+            <a:off x="8584205" y="3898834"/>
+            <a:ext cx="1093401" cy="640080"/>
+          </a:xfrm>
+          <a:prstGeom prst="rect">
+            <a:avLst/>
+          </a:prstGeom>
+        </p:spPr>
+        <p:style>
+          <a:lnRef idx="1">
+            <a:schemeClr val="accent5"/>
+          </a:lnRef>
+          <a:fillRef idx="2">
+            <a:schemeClr val="accent5"/>
+          </a:fillRef>
+          <a:effectRef idx="1">
+            <a:schemeClr val="accent5"/>
+          </a:effectRef>
+          <a:fontRef idx="minor">
+            <a:schemeClr val="dk1"/>
+          </a:fontRef>
+        </p:style>
+        <p:txBody>
+          <a:bodyPr rtlCol="0" anchor="ctr"/>
+          <a:lstStyle/>
+          <a:p>
+            <a:pPr algn="ctr"/>
+            <a:r>
+              <a:rPr lang="en-US" dirty="0"/>
+              <a:t>Non-Defect</a:t>
+            </a:r>
+          </a:p>
+        </p:txBody>
+      </p:sp>
+      <p:sp>
+        <p:nvSpPr>
+          <p:cNvPr id="18" name="Rectangle 17">
+            <a:extLst>
+              <a:ext uri="{FF2B5EF4-FFF2-40B4-BE49-F238E27FC236}">
+                <a16:creationId xmlns:a16="http://schemas.microsoft.com/office/drawing/2014/main" id="{82A0C7E3-1FE6-0C68-867F-C3DE90ADEB5C}"/>
+              </a:ext>
+            </a:extLst>
+          </p:cNvPr>
+          <p:cNvSpPr/>
+          <p:nvPr/>
+        </p:nvSpPr>
+        <p:spPr>
+          <a:xfrm>
+            <a:off x="4565314" y="3041462"/>
+            <a:ext cx="1093401" cy="640080"/>
+          </a:xfrm>
+          <a:prstGeom prst="rect">
+            <a:avLst/>
+          </a:prstGeom>
+        </p:spPr>
+        <p:style>
+          <a:lnRef idx="1">
+            <a:schemeClr val="accent2"/>
+          </a:lnRef>
+          <a:fillRef idx="2">
+            <a:schemeClr val="accent2"/>
+          </a:fillRef>
+          <a:effectRef idx="1">
+            <a:schemeClr val="accent2"/>
+          </a:effectRef>
+          <a:fontRef idx="minor">
+            <a:schemeClr val="dk1"/>
+          </a:fontRef>
+        </p:style>
+        <p:txBody>
+          <a:bodyPr rtlCol="0" anchor="ctr"/>
+          <a:lstStyle/>
+          <a:p>
+            <a:pPr algn="ctr"/>
+            <a:r>
+              <a:rPr lang="en-US" dirty="0"/>
+              <a:t>Defect</a:t>
+            </a:r>
+          </a:p>
+        </p:txBody>
+      </p:sp>
+      <p:sp>
+        <p:nvSpPr>
+          <p:cNvPr id="19" name="Rectangle 18">
+            <a:extLst>
+              <a:ext uri="{FF2B5EF4-FFF2-40B4-BE49-F238E27FC236}">
+                <a16:creationId xmlns:a16="http://schemas.microsoft.com/office/drawing/2014/main" id="{488A6E74-260D-95A7-8C51-1C094A02F8A4}"/>
+              </a:ext>
+            </a:extLst>
+          </p:cNvPr>
+          <p:cNvSpPr/>
+          <p:nvPr/>
+        </p:nvSpPr>
+        <p:spPr>
+          <a:xfrm>
+            <a:off x="5912530" y="3013457"/>
+            <a:ext cx="1093401" cy="640080"/>
+          </a:xfrm>
+          <a:prstGeom prst="rect">
+            <a:avLst/>
+          </a:prstGeom>
+        </p:spPr>
+        <p:style>
+          <a:lnRef idx="1">
+            <a:schemeClr val="accent5"/>
+          </a:lnRef>
+          <a:fillRef idx="2">
+            <a:schemeClr val="accent5"/>
+          </a:fillRef>
+          <a:effectRef idx="1">
+            <a:schemeClr val="accent5"/>
+          </a:effectRef>
+          <a:fontRef idx="minor">
+            <a:schemeClr val="dk1"/>
+          </a:fontRef>
+        </p:style>
+        <p:txBody>
+          <a:bodyPr rtlCol="0" anchor="ctr"/>
+          <a:lstStyle/>
+          <a:p>
+            <a:pPr algn="ctr"/>
+            <a:r>
+              <a:rPr lang="en-US" dirty="0"/>
+              <a:t>Non-Defect</a:t>
+            </a:r>
+          </a:p>
+        </p:txBody>
+      </p:sp>
+      <p:sp>
+        <p:nvSpPr>
+          <p:cNvPr id="20" name="Rectangle 19">
+            <a:extLst>
+              <a:ext uri="{FF2B5EF4-FFF2-40B4-BE49-F238E27FC236}">
+                <a16:creationId xmlns:a16="http://schemas.microsoft.com/office/drawing/2014/main" id="{96052282-C730-F1AF-2D61-9834BF23482B}"/>
+              </a:ext>
+            </a:extLst>
+          </p:cNvPr>
+          <p:cNvSpPr/>
+          <p:nvPr/>
+        </p:nvSpPr>
+        <p:spPr>
+          <a:xfrm>
+            <a:off x="7207930" y="3013457"/>
+            <a:ext cx="1093401" cy="640080"/>
+          </a:xfrm>
+          <a:prstGeom prst="rect">
+            <a:avLst/>
+          </a:prstGeom>
+        </p:spPr>
+        <p:style>
+          <a:lnRef idx="1">
+            <a:schemeClr val="accent5"/>
+          </a:lnRef>
+          <a:fillRef idx="2">
+            <a:schemeClr val="accent5"/>
+          </a:fillRef>
+          <a:effectRef idx="1">
+            <a:schemeClr val="accent5"/>
+          </a:effectRef>
+          <a:fontRef idx="minor">
+            <a:schemeClr val="dk1"/>
+          </a:fontRef>
+        </p:style>
+        <p:txBody>
+          <a:bodyPr rtlCol="0" anchor="ctr"/>
+          <a:lstStyle/>
+          <a:p>
+            <a:pPr algn="ctr"/>
+            <a:r>
+              <a:rPr lang="en-US" dirty="0"/>
+              <a:t>Non-Defect</a:t>
+            </a:r>
+          </a:p>
+        </p:txBody>
+      </p:sp>
+      <p:sp>
+        <p:nvSpPr>
+          <p:cNvPr id="21" name="Rectangle 20">
+            <a:extLst>
+              <a:ext uri="{FF2B5EF4-FFF2-40B4-BE49-F238E27FC236}">
+                <a16:creationId xmlns:a16="http://schemas.microsoft.com/office/drawing/2014/main" id="{7C24B573-A237-4CB0-5562-9A995750959A}"/>
+              </a:ext>
+            </a:extLst>
+          </p:cNvPr>
+          <p:cNvSpPr/>
+          <p:nvPr/>
+        </p:nvSpPr>
+        <p:spPr>
+          <a:xfrm>
+            <a:off x="8523451" y="3041462"/>
+            <a:ext cx="1093401" cy="640080"/>
+          </a:xfrm>
+          <a:prstGeom prst="rect">
+            <a:avLst/>
+          </a:prstGeom>
+        </p:spPr>
+        <p:style>
+          <a:lnRef idx="1">
+            <a:schemeClr val="accent5"/>
+          </a:lnRef>
+          <a:fillRef idx="2">
+            <a:schemeClr val="accent5"/>
+          </a:fillRef>
+          <a:effectRef idx="1">
+            <a:schemeClr val="accent5"/>
+          </a:effectRef>
+          <a:fontRef idx="minor">
+            <a:schemeClr val="dk1"/>
+          </a:fontRef>
+        </p:style>
+        <p:txBody>
+          <a:bodyPr rtlCol="0" anchor="ctr"/>
+          <a:lstStyle/>
+          <a:p>
+            <a:pPr algn="ctr"/>
+            <a:r>
+              <a:rPr lang="en-US" dirty="0"/>
+              <a:t>Non-Defect</a:t>
+            </a:r>
+          </a:p>
+        </p:txBody>
+      </p:sp>
+      <p:sp>
+        <p:nvSpPr>
+          <p:cNvPr id="22" name="Rectangle 21">
+            <a:extLst>
+              <a:ext uri="{FF2B5EF4-FFF2-40B4-BE49-F238E27FC236}">
+                <a16:creationId xmlns:a16="http://schemas.microsoft.com/office/drawing/2014/main" id="{B08C7687-427A-8FDA-E97A-637B4B5F73AD}"/>
+              </a:ext>
+            </a:extLst>
+          </p:cNvPr>
+          <p:cNvSpPr/>
+          <p:nvPr/>
+        </p:nvSpPr>
+        <p:spPr>
+          <a:xfrm>
+            <a:off x="5912530" y="2281660"/>
+            <a:ext cx="1093401" cy="640080"/>
+          </a:xfrm>
+          <a:prstGeom prst="rect">
+            <a:avLst/>
+          </a:prstGeom>
+        </p:spPr>
+        <p:style>
+          <a:lnRef idx="1">
+            <a:schemeClr val="accent5"/>
+          </a:lnRef>
+          <a:fillRef idx="2">
+            <a:schemeClr val="accent5"/>
+          </a:fillRef>
+          <a:effectRef idx="1">
+            <a:schemeClr val="accent5"/>
+          </a:effectRef>
+          <a:fontRef idx="minor">
+            <a:schemeClr val="dk1"/>
+          </a:fontRef>
+        </p:style>
+        <p:txBody>
+          <a:bodyPr rtlCol="0" anchor="ctr"/>
+          <a:lstStyle/>
+          <a:p>
+            <a:pPr algn="ctr"/>
+            <a:r>
+              <a:rPr lang="en-US" dirty="0"/>
+              <a:t>Non-Defect</a:t>
+            </a:r>
+          </a:p>
+        </p:txBody>
+      </p:sp>
+      <p:sp>
+        <p:nvSpPr>
+          <p:cNvPr id="23" name="Rectangle 22">
+            <a:extLst>
+              <a:ext uri="{FF2B5EF4-FFF2-40B4-BE49-F238E27FC236}">
+                <a16:creationId xmlns:a16="http://schemas.microsoft.com/office/drawing/2014/main" id="{8ACAF9B3-C927-7F4D-D579-B5A7195872A9}"/>
+              </a:ext>
+            </a:extLst>
+          </p:cNvPr>
+          <p:cNvSpPr/>
+          <p:nvPr/>
+        </p:nvSpPr>
+        <p:spPr>
+          <a:xfrm>
+            <a:off x="7207930" y="2281660"/>
+            <a:ext cx="1093401" cy="640080"/>
+          </a:xfrm>
+          <a:prstGeom prst="rect">
+            <a:avLst/>
+          </a:prstGeom>
+        </p:spPr>
+        <p:style>
+          <a:lnRef idx="1">
+            <a:schemeClr val="accent5"/>
+          </a:lnRef>
+          <a:fillRef idx="2">
+            <a:schemeClr val="accent5"/>
+          </a:fillRef>
+          <a:effectRef idx="1">
+            <a:schemeClr val="accent5"/>
+          </a:effectRef>
+          <a:fontRef idx="minor">
+            <a:schemeClr val="dk1"/>
+          </a:fontRef>
+        </p:style>
+        <p:txBody>
+          <a:bodyPr rtlCol="0" anchor="ctr"/>
+          <a:lstStyle/>
+          <a:p>
+            <a:pPr algn="ctr"/>
+            <a:r>
+              <a:rPr lang="en-US" dirty="0"/>
+              <a:t>Non-Defect</a:t>
+            </a:r>
+          </a:p>
+        </p:txBody>
+      </p:sp>
+      <p:sp>
+        <p:nvSpPr>
+          <p:cNvPr id="24" name="Rectangle 23">
+            <a:extLst>
+              <a:ext uri="{FF2B5EF4-FFF2-40B4-BE49-F238E27FC236}">
+                <a16:creationId xmlns:a16="http://schemas.microsoft.com/office/drawing/2014/main" id="{219307C9-14F3-4E35-5304-9C24F6CE55DE}"/>
+              </a:ext>
+            </a:extLst>
+          </p:cNvPr>
+          <p:cNvSpPr/>
+          <p:nvPr/>
+        </p:nvSpPr>
+        <p:spPr>
+          <a:xfrm>
+            <a:off x="8523451" y="2309665"/>
+            <a:ext cx="1093401" cy="640080"/>
+          </a:xfrm>
+          <a:prstGeom prst="rect">
+            <a:avLst/>
+          </a:prstGeom>
+        </p:spPr>
+        <p:style>
+          <a:lnRef idx="1">
+            <a:schemeClr val="accent5"/>
+          </a:lnRef>
+          <a:fillRef idx="2">
+            <a:schemeClr val="accent5"/>
+          </a:fillRef>
+          <a:effectRef idx="1">
+            <a:schemeClr val="accent5"/>
+          </a:effectRef>
+          <a:fontRef idx="minor">
+            <a:schemeClr val="dk1"/>
+          </a:fontRef>
+        </p:style>
+        <p:txBody>
+          <a:bodyPr rtlCol="0" anchor="ctr"/>
+          <a:lstStyle/>
+          <a:p>
+            <a:pPr algn="ctr"/>
+            <a:r>
+              <a:rPr lang="en-US" dirty="0"/>
+              <a:t>Non-Defect</a:t>
+            </a:r>
+          </a:p>
+        </p:txBody>
+      </p:sp>
+      <p:sp>
+        <p:nvSpPr>
+          <p:cNvPr id="25" name="Rectangle 24">
+            <a:extLst>
+              <a:ext uri="{FF2B5EF4-FFF2-40B4-BE49-F238E27FC236}">
+                <a16:creationId xmlns:a16="http://schemas.microsoft.com/office/drawing/2014/main" id="{C9392F71-BDA8-7259-1125-5DB233712AEC}"/>
+              </a:ext>
+            </a:extLst>
+          </p:cNvPr>
+          <p:cNvSpPr/>
+          <p:nvPr/>
+        </p:nvSpPr>
+        <p:spPr>
+          <a:xfrm>
+            <a:off x="4618757" y="2281660"/>
             <a:ext cx="1093401" cy="640080"/>
           </a:xfrm>
           <a:prstGeom prst="rect">
@@ -6252,8 +6907,8 @@
           <a:chExt cx="0" cy="0"/>
         </a:xfrm>
       </p:grpSpPr>
-      <mc:AlternateContent xmlns:mc="http://schemas.openxmlformats.org/markup-compatibility/2006">
-        <mc:Choice xmlns:a14="http://schemas.microsoft.com/office/drawing/2010/main" Requires="a14">
+      <mc:AlternateContent xmlns:mc="http://schemas.openxmlformats.org/markup-compatibility/2006" xmlns:a14="http://schemas.microsoft.com/office/drawing/2010/main">
+        <mc:Choice Requires="a14">
           <p:sp>
             <p:nvSpPr>
               <p:cNvPr id="5" name="TextBox 4">
@@ -6720,7 +7375,7 @@
             </p:txBody>
           </p:sp>
         </mc:Choice>
-        <mc:Fallback>
+        <mc:Fallback xmlns="">
           <p:sp>
             <p:nvSpPr>
               <p:cNvPr id="5" name="TextBox 4">
@@ -6801,8 +7456,8 @@
           <a:chExt cx="0" cy="0"/>
         </a:xfrm>
       </p:grpSpPr>
-      <mc:AlternateContent xmlns:mc="http://schemas.openxmlformats.org/markup-compatibility/2006">
-        <mc:Choice xmlns:a14="http://schemas.microsoft.com/office/drawing/2010/main" Requires="a14">
+      <mc:AlternateContent xmlns:mc="http://schemas.openxmlformats.org/markup-compatibility/2006" xmlns:a14="http://schemas.microsoft.com/office/drawing/2010/main">
+        <mc:Choice Requires="a14">
           <p:sp>
             <p:nvSpPr>
               <p:cNvPr id="5" name="TextBox 4">
@@ -7275,7 +7930,7 @@
             </p:txBody>
           </p:sp>
         </mc:Choice>
-        <mc:Fallback>
+        <mc:Fallback xmlns="">
           <p:sp>
             <p:nvSpPr>
               <p:cNvPr id="5" name="TextBox 4">
@@ -7458,7 +8113,7 @@
                   </a:schemeClr>
                 </a:solidFill>
               </a:rPr>
-              <a:t> of getting 2 H in 4 coin tosses: </a:t>
+              <a:t> of getting 2 H in 4-coin tosses: </a:t>
             </a:r>
           </a:p>
           <a:p>
@@ -7637,7 +8292,7 @@
         </p:blipFill>
         <p:spPr>
           <a:xfrm>
-            <a:off x="5230306" y="4370521"/>
+            <a:off x="5769802" y="4544257"/>
             <a:ext cx="4220080" cy="839764"/>
           </a:xfrm>
           <a:prstGeom prst="rect">
@@ -7741,6 +8396,236 @@
           </a:prstGeom>
         </p:spPr>
       </p:pic>
+      <p:sp>
+        <p:nvSpPr>
+          <p:cNvPr id="2" name="Oval 1">
+            <a:extLst>
+              <a:ext uri="{FF2B5EF4-FFF2-40B4-BE49-F238E27FC236}">
+                <a16:creationId xmlns:a16="http://schemas.microsoft.com/office/drawing/2014/main" id="{0BF4982D-91F2-5CC4-6BFA-2EC1E6E0E322}"/>
+              </a:ext>
+            </a:extLst>
+          </p:cNvPr>
+          <p:cNvSpPr/>
+          <p:nvPr/>
+        </p:nvSpPr>
+        <p:spPr>
+          <a:xfrm>
+            <a:off x="7763256" y="2148840"/>
+            <a:ext cx="539496" cy="539496"/>
+          </a:xfrm>
+          <a:prstGeom prst="ellipse">
+            <a:avLst/>
+          </a:prstGeom>
+        </p:spPr>
+        <p:style>
+          <a:lnRef idx="2">
+            <a:schemeClr val="accent1">
+              <a:shade val="15000"/>
+            </a:schemeClr>
+          </a:lnRef>
+          <a:fillRef idx="1">
+            <a:schemeClr val="accent1"/>
+          </a:fillRef>
+          <a:effectRef idx="0">
+            <a:schemeClr val="accent1"/>
+          </a:effectRef>
+          <a:fontRef idx="minor">
+            <a:schemeClr val="lt1"/>
+          </a:fontRef>
+        </p:style>
+        <p:txBody>
+          <a:bodyPr rtlCol="0" anchor="ctr"/>
+          <a:lstStyle/>
+          <a:p>
+            <a:pPr algn="ctr"/>
+            <a:endParaRPr lang="en-US"/>
+          </a:p>
+        </p:txBody>
+      </p:sp>
+      <p:sp>
+        <p:nvSpPr>
+          <p:cNvPr id="3" name="Oval 2">
+            <a:extLst>
+              <a:ext uri="{FF2B5EF4-FFF2-40B4-BE49-F238E27FC236}">
+                <a16:creationId xmlns:a16="http://schemas.microsoft.com/office/drawing/2014/main" id="{37D84878-6D34-9D87-99DF-AE2B19E4A8EB}"/>
+              </a:ext>
+            </a:extLst>
+          </p:cNvPr>
+          <p:cNvSpPr/>
+          <p:nvPr/>
+        </p:nvSpPr>
+        <p:spPr>
+          <a:xfrm>
+            <a:off x="8455152" y="2148840"/>
+            <a:ext cx="539496" cy="539496"/>
+          </a:xfrm>
+          <a:prstGeom prst="ellipse">
+            <a:avLst/>
+          </a:prstGeom>
+        </p:spPr>
+        <p:style>
+          <a:lnRef idx="2">
+            <a:schemeClr val="accent1">
+              <a:shade val="15000"/>
+            </a:schemeClr>
+          </a:lnRef>
+          <a:fillRef idx="1">
+            <a:schemeClr val="accent1"/>
+          </a:fillRef>
+          <a:effectRef idx="0">
+            <a:schemeClr val="accent1"/>
+          </a:effectRef>
+          <a:fontRef idx="minor">
+            <a:schemeClr val="lt1"/>
+          </a:fontRef>
+        </p:style>
+        <p:txBody>
+          <a:bodyPr rtlCol="0" anchor="ctr"/>
+          <a:lstStyle/>
+          <a:p>
+            <a:pPr algn="ctr"/>
+            <a:endParaRPr lang="en-US"/>
+          </a:p>
+        </p:txBody>
+      </p:sp>
+      <p:sp>
+        <p:nvSpPr>
+          <p:cNvPr id="5" name="Oval 4">
+            <a:extLst>
+              <a:ext uri="{FF2B5EF4-FFF2-40B4-BE49-F238E27FC236}">
+                <a16:creationId xmlns:a16="http://schemas.microsoft.com/office/drawing/2014/main" id="{1795F88B-229D-B263-AA1A-56886F243C3F}"/>
+              </a:ext>
+            </a:extLst>
+          </p:cNvPr>
+          <p:cNvSpPr/>
+          <p:nvPr/>
+        </p:nvSpPr>
+        <p:spPr>
+          <a:xfrm>
+            <a:off x="9147048" y="2167128"/>
+            <a:ext cx="539496" cy="539496"/>
+          </a:xfrm>
+          <a:prstGeom prst="ellipse">
+            <a:avLst/>
+          </a:prstGeom>
+        </p:spPr>
+        <p:style>
+          <a:lnRef idx="2">
+            <a:schemeClr val="accent1">
+              <a:shade val="15000"/>
+            </a:schemeClr>
+          </a:lnRef>
+          <a:fillRef idx="1">
+            <a:schemeClr val="accent1"/>
+          </a:fillRef>
+          <a:effectRef idx="0">
+            <a:schemeClr val="accent1"/>
+          </a:effectRef>
+          <a:fontRef idx="minor">
+            <a:schemeClr val="lt1"/>
+          </a:fontRef>
+        </p:style>
+        <p:txBody>
+          <a:bodyPr rtlCol="0" anchor="ctr"/>
+          <a:lstStyle/>
+          <a:p>
+            <a:pPr algn="ctr"/>
+            <a:endParaRPr lang="en-US"/>
+          </a:p>
+        </p:txBody>
+      </p:sp>
+      <p:sp>
+        <p:nvSpPr>
+          <p:cNvPr id="7" name="Oval 6">
+            <a:extLst>
+              <a:ext uri="{FF2B5EF4-FFF2-40B4-BE49-F238E27FC236}">
+                <a16:creationId xmlns:a16="http://schemas.microsoft.com/office/drawing/2014/main" id="{ADE29404-63B7-5C14-E94E-8F08C53789A0}"/>
+              </a:ext>
+            </a:extLst>
+          </p:cNvPr>
+          <p:cNvSpPr/>
+          <p:nvPr/>
+        </p:nvSpPr>
+        <p:spPr>
+          <a:xfrm>
+            <a:off x="9812212" y="2167128"/>
+            <a:ext cx="539496" cy="539496"/>
+          </a:xfrm>
+          <a:prstGeom prst="ellipse">
+            <a:avLst/>
+          </a:prstGeom>
+        </p:spPr>
+        <p:style>
+          <a:lnRef idx="2">
+            <a:schemeClr val="accent1">
+              <a:shade val="15000"/>
+            </a:schemeClr>
+          </a:lnRef>
+          <a:fillRef idx="1">
+            <a:schemeClr val="accent1"/>
+          </a:fillRef>
+          <a:effectRef idx="0">
+            <a:schemeClr val="accent1"/>
+          </a:effectRef>
+          <a:fontRef idx="minor">
+            <a:schemeClr val="lt1"/>
+          </a:fontRef>
+        </p:style>
+        <p:txBody>
+          <a:bodyPr rtlCol="0" anchor="ctr"/>
+          <a:lstStyle/>
+          <a:p>
+            <a:pPr algn="ctr"/>
+            <a:endParaRPr lang="en-US"/>
+          </a:p>
+        </p:txBody>
+      </p:sp>
+      <p:sp>
+        <p:nvSpPr>
+          <p:cNvPr id="8" name="Oval 7">
+            <a:extLst>
+              <a:ext uri="{FF2B5EF4-FFF2-40B4-BE49-F238E27FC236}">
+                <a16:creationId xmlns:a16="http://schemas.microsoft.com/office/drawing/2014/main" id="{96862EDE-FDC0-3E89-D13D-A4807D29DE11}"/>
+              </a:ext>
+            </a:extLst>
+          </p:cNvPr>
+          <p:cNvSpPr/>
+          <p:nvPr/>
+        </p:nvSpPr>
+        <p:spPr>
+          <a:xfrm>
+            <a:off x="10530840" y="2167128"/>
+            <a:ext cx="539496" cy="539496"/>
+          </a:xfrm>
+          <a:prstGeom prst="ellipse">
+            <a:avLst/>
+          </a:prstGeom>
+        </p:spPr>
+        <p:style>
+          <a:lnRef idx="2">
+            <a:schemeClr val="accent1">
+              <a:shade val="15000"/>
+            </a:schemeClr>
+          </a:lnRef>
+          <a:fillRef idx="1">
+            <a:schemeClr val="accent1"/>
+          </a:fillRef>
+          <a:effectRef idx="0">
+            <a:schemeClr val="accent1"/>
+          </a:effectRef>
+          <a:fontRef idx="minor">
+            <a:schemeClr val="lt1"/>
+          </a:fontRef>
+        </p:style>
+        <p:txBody>
+          <a:bodyPr rtlCol="0" anchor="ctr"/>
+          <a:lstStyle/>
+          <a:p>
+            <a:pPr algn="ctr"/>
+            <a:endParaRPr lang="en-US"/>
+          </a:p>
+        </p:txBody>
+      </p:sp>
     </p:spTree>
     <p:extLst>
       <p:ext uri="{BB962C8B-B14F-4D97-AF65-F5344CB8AC3E}">
@@ -7822,7 +8707,7 @@
         <p:spPr>
           <a:xfrm>
             <a:off x="278892" y="524548"/>
-            <a:ext cx="7530084" cy="4154984"/>
+            <a:ext cx="7530084" cy="3785652"/>
           </a:xfrm>
           <a:prstGeom prst="rect">
             <a:avLst/>
@@ -7841,8 +8726,9 @@
             <a:r>
               <a:rPr lang="en-US" sz="2400" dirty="0">
                 <a:solidFill>
-                  <a:schemeClr val="bg1">
-                    <a:lumMod val="95000"/>
+                  <a:schemeClr val="accent6">
+                    <a:lumMod val="60000"/>
+                    <a:lumOff val="40000"/>
                   </a:schemeClr>
                 </a:solidFill>
               </a:rPr>
@@ -7856,8 +8742,9 @@
             <a:r>
               <a:rPr lang="en-US" sz="2400" dirty="0">
                 <a:solidFill>
-                  <a:schemeClr val="bg1">
-                    <a:lumMod val="95000"/>
+                  <a:schemeClr val="accent6">
+                    <a:lumMod val="60000"/>
+                    <a:lumOff val="40000"/>
                   </a:schemeClr>
                 </a:solidFill>
               </a:rPr>
@@ -7866,8 +8753,9 @@
             <a:r>
               <a:rPr lang="en-US" sz="2400" b="1" dirty="0">
                 <a:solidFill>
-                  <a:schemeClr val="bg1">
-                    <a:lumMod val="95000"/>
+                  <a:schemeClr val="accent6">
+                    <a:lumMod val="60000"/>
+                    <a:lumOff val="40000"/>
                   </a:schemeClr>
                 </a:solidFill>
               </a:rPr>
@@ -7876,8 +8764,9 @@
             <a:r>
               <a:rPr lang="en-US" sz="2400" dirty="0">
                 <a:solidFill>
-                  <a:schemeClr val="bg1">
-                    <a:lumMod val="95000"/>
+                  <a:schemeClr val="accent6">
+                    <a:lumMod val="60000"/>
+                    <a:lumOff val="40000"/>
                   </a:schemeClr>
                 </a:solidFill>
               </a:rPr>
@@ -7886,8 +8775,9 @@
             <a:r>
               <a:rPr lang="en-US" sz="2400" b="1" dirty="0">
                 <a:solidFill>
-                  <a:schemeClr val="bg1">
-                    <a:lumMod val="95000"/>
+                  <a:schemeClr val="accent6">
+                    <a:lumMod val="60000"/>
+                    <a:lumOff val="40000"/>
                   </a:schemeClr>
                 </a:solidFill>
               </a:rPr>
@@ -7896,8 +8786,9 @@
             <a:r>
               <a:rPr lang="en-US" sz="2400" dirty="0">
                 <a:solidFill>
-                  <a:schemeClr val="bg1">
-                    <a:lumMod val="95000"/>
+                  <a:schemeClr val="accent6">
+                    <a:lumMod val="60000"/>
+                    <a:lumOff val="40000"/>
                   </a:schemeClr>
                 </a:solidFill>
               </a:rPr>
@@ -7911,8 +8802,9 @@
             <a:r>
               <a:rPr lang="en-US" sz="2400" dirty="0">
                 <a:solidFill>
-                  <a:schemeClr val="bg1">
-                    <a:lumMod val="95000"/>
+                  <a:schemeClr val="accent6">
+                    <a:lumMod val="60000"/>
+                    <a:lumOff val="40000"/>
                   </a:schemeClr>
                 </a:solidFill>
               </a:rPr>
@@ -7925,8 +8817,9 @@
             </a:pPr>
             <a:endParaRPr lang="en-US" sz="2400" dirty="0">
               <a:solidFill>
-                <a:schemeClr val="bg1">
-                  <a:lumMod val="95000"/>
+                <a:schemeClr val="accent6">
+                  <a:lumMod val="60000"/>
+                  <a:lumOff val="40000"/>
                 </a:schemeClr>
               </a:solidFill>
             </a:endParaRPr>
@@ -7938,8 +8831,9 @@
             <a:r>
               <a:rPr lang="en-US" sz="2400" b="1" dirty="0">
                 <a:solidFill>
-                  <a:schemeClr val="bg1">
-                    <a:lumMod val="95000"/>
+                  <a:schemeClr val="accent6">
+                    <a:lumMod val="60000"/>
+                    <a:lumOff val="40000"/>
                   </a:schemeClr>
                 </a:solidFill>
               </a:rPr>
@@ -7952,8 +8846,9 @@
             </a:pPr>
             <a:endParaRPr lang="en-US" sz="2400" b="1" dirty="0">
               <a:solidFill>
-                <a:schemeClr val="bg1">
-                  <a:lumMod val="95000"/>
+                <a:schemeClr val="accent6">
+                  <a:lumMod val="60000"/>
+                  <a:lumOff val="40000"/>
                 </a:schemeClr>
               </a:solidFill>
             </a:endParaRPr>
@@ -7965,8 +8860,9 @@
             <a:r>
               <a:rPr lang="en-US" sz="2400" dirty="0">
                 <a:solidFill>
-                  <a:schemeClr val="bg1">
-                    <a:lumMod val="95000"/>
+                  <a:schemeClr val="accent6">
+                    <a:lumMod val="60000"/>
+                    <a:lumOff val="40000"/>
                   </a:schemeClr>
                 </a:solidFill>
               </a:rPr>
@@ -7980,8 +8876,9 @@
             <a:r>
               <a:rPr lang="en-US" sz="2400" dirty="0">
                 <a:solidFill>
-                  <a:schemeClr val="bg1">
-                    <a:lumMod val="95000"/>
+                  <a:schemeClr val="accent6">
+                    <a:lumMod val="60000"/>
+                    <a:lumOff val="40000"/>
                   </a:schemeClr>
                 </a:solidFill>
               </a:rPr>
@@ -7995,25 +8892,14 @@
             <a:r>
               <a:rPr lang="en-US" sz="2400" dirty="0">
                 <a:solidFill>
-                  <a:schemeClr val="bg1">
-                    <a:lumMod val="95000"/>
+                  <a:schemeClr val="accent6">
+                    <a:lumMod val="60000"/>
+                    <a:lumOff val="40000"/>
                   </a:schemeClr>
                 </a:solidFill>
               </a:rPr>
-              <a:t>Success is getting a defective part. So k=2</a:t>
-            </a:r>
-          </a:p>
-          <a:p>
-            <a:pPr>
-              <a:buNone/>
-            </a:pPr>
-            <a:endParaRPr lang="en-US" sz="2400" dirty="0">
-              <a:solidFill>
-                <a:schemeClr val="bg1">
-                  <a:lumMod val="95000"/>
-                </a:schemeClr>
-              </a:solidFill>
-            </a:endParaRPr>
+              <a:t>Success is getting a defective part. So, k=2</a:t>
+            </a:r>
           </a:p>
         </p:txBody>
       </p:sp>

--- a/probability_and_statistics/4_probability_distribution/Stats-PDF-3-Discrete-Binomial.pptx
+++ b/probability_and_statistics/4_probability_distribution/Stats-PDF-3-Discrete-Binomial.pptx
@@ -228,7 +228,7 @@
           <a:p>
             <a:fld id="{7BAEECA8-D063-486F-AE31-5020270C1449}" type="datetimeFigureOut">
               <a:rPr lang="en-US" smtClean="0"/>
-              <a:t>4/6/2026</a:t>
+              <a:t>5/1/2026</a:t>
             </a:fld>
             <a:endParaRPr lang="en-US"/>
           </a:p>
@@ -470,7 +470,7 @@
           <a:p>
             <a:fld id="{6383FAE1-13DE-4511-8C1B-C8AFB720664C}" type="datetimeFigureOut">
               <a:rPr lang="en-US" smtClean="0"/>
-              <a:t>4/6/2026</a:t>
+              <a:t>5/1/2026</a:t>
             </a:fld>
             <a:endParaRPr lang="en-US"/>
           </a:p>
@@ -668,7 +668,7 @@
           <a:p>
             <a:fld id="{6383FAE1-13DE-4511-8C1B-C8AFB720664C}" type="datetimeFigureOut">
               <a:rPr lang="en-US" smtClean="0"/>
-              <a:t>4/6/2026</a:t>
+              <a:t>5/1/2026</a:t>
             </a:fld>
             <a:endParaRPr lang="en-US"/>
           </a:p>
@@ -876,7 +876,7 @@
           <a:p>
             <a:fld id="{6383FAE1-13DE-4511-8C1B-C8AFB720664C}" type="datetimeFigureOut">
               <a:rPr lang="en-US" smtClean="0"/>
-              <a:t>4/6/2026</a:t>
+              <a:t>5/1/2026</a:t>
             </a:fld>
             <a:endParaRPr lang="en-US"/>
           </a:p>
@@ -1074,7 +1074,7 @@
           <a:p>
             <a:fld id="{6383FAE1-13DE-4511-8C1B-C8AFB720664C}" type="datetimeFigureOut">
               <a:rPr lang="en-US" smtClean="0"/>
-              <a:t>4/6/2026</a:t>
+              <a:t>5/1/2026</a:t>
             </a:fld>
             <a:endParaRPr lang="en-US"/>
           </a:p>
@@ -1349,7 +1349,7 @@
           <a:p>
             <a:fld id="{6383FAE1-13DE-4511-8C1B-C8AFB720664C}" type="datetimeFigureOut">
               <a:rPr lang="en-US" smtClean="0"/>
-              <a:t>4/6/2026</a:t>
+              <a:t>5/1/2026</a:t>
             </a:fld>
             <a:endParaRPr lang="en-US"/>
           </a:p>
@@ -1614,7 +1614,7 @@
           <a:p>
             <a:fld id="{6383FAE1-13DE-4511-8C1B-C8AFB720664C}" type="datetimeFigureOut">
               <a:rPr lang="en-US" smtClean="0"/>
-              <a:t>4/6/2026</a:t>
+              <a:t>5/1/2026</a:t>
             </a:fld>
             <a:endParaRPr lang="en-US"/>
           </a:p>
@@ -2026,7 +2026,7 @@
           <a:p>
             <a:fld id="{6383FAE1-13DE-4511-8C1B-C8AFB720664C}" type="datetimeFigureOut">
               <a:rPr lang="en-US" smtClean="0"/>
-              <a:t>4/6/2026</a:t>
+              <a:t>5/1/2026</a:t>
             </a:fld>
             <a:endParaRPr lang="en-US"/>
           </a:p>
@@ -2167,7 +2167,7 @@
           <a:p>
             <a:fld id="{6383FAE1-13DE-4511-8C1B-C8AFB720664C}" type="datetimeFigureOut">
               <a:rPr lang="en-US" smtClean="0"/>
-              <a:t>4/6/2026</a:t>
+              <a:t>5/1/2026</a:t>
             </a:fld>
             <a:endParaRPr lang="en-US"/>
           </a:p>
@@ -2280,7 +2280,7 @@
           <a:p>
             <a:fld id="{6383FAE1-13DE-4511-8C1B-C8AFB720664C}" type="datetimeFigureOut">
               <a:rPr lang="en-US" smtClean="0"/>
-              <a:t>4/6/2026</a:t>
+              <a:t>5/1/2026</a:t>
             </a:fld>
             <a:endParaRPr lang="en-US"/>
           </a:p>
@@ -2591,7 +2591,7 @@
           <a:p>
             <a:fld id="{6383FAE1-13DE-4511-8C1B-C8AFB720664C}" type="datetimeFigureOut">
               <a:rPr lang="en-US" smtClean="0"/>
-              <a:t>4/6/2026</a:t>
+              <a:t>5/1/2026</a:t>
             </a:fld>
             <a:endParaRPr lang="en-US"/>
           </a:p>
@@ -2882,7 +2882,7 @@
           <a:p>
             <a:fld id="{6383FAE1-13DE-4511-8C1B-C8AFB720664C}" type="datetimeFigureOut">
               <a:rPr lang="en-US" smtClean="0"/>
-              <a:t>4/6/2026</a:t>
+              <a:t>5/1/2026</a:t>
             </a:fld>
             <a:endParaRPr lang="en-US"/>
           </a:p>
@@ -3126,7 +3126,7 @@
           <a:p>
             <a:fld id="{6383FAE1-13DE-4511-8C1B-C8AFB720664C}" type="datetimeFigureOut">
               <a:rPr lang="en-US" smtClean="0"/>
-              <a:t>4/6/2026</a:t>
+              <a:t>5/1/2026</a:t>
             </a:fld>
             <a:endParaRPr lang="en-US"/>
           </a:p>
@@ -4734,10 +4734,6 @@
             </a:endParaRPr>
           </a:p>
           <a:p>
-            <a:pPr marL="457200" indent="-457200">
-              <a:buFont typeface="Arial" panose="020B0604020202020204" pitchFamily="34" charset="0"/>
-              <a:buChar char="•"/>
-            </a:pPr>
             <a:r>
               <a:rPr lang="en-US" sz="2800" dirty="0">
                 <a:solidFill>
@@ -5134,31 +5130,7 @@
                             </a:solidFill>
                             <a:latin typeface="Cambria Math" panose="02040503050406030204" pitchFamily="18" charset="0"/>
                           </a:rPr>
-                          <m:t>(</m:t>
-                        </m:r>
-                        <m:r>
-                          <a:rPr lang="en-US" sz="2400" b="0" i="1" dirty="0" smtClean="0">
-                            <a:solidFill>
-                              <a:schemeClr val="accent6">
-                                <a:lumMod val="60000"/>
-                                <a:lumOff val="40000"/>
-                              </a:schemeClr>
-                            </a:solidFill>
-                            <a:latin typeface="Cambria Math" panose="02040503050406030204" pitchFamily="18" charset="0"/>
-                          </a:rPr>
-                          <m:t>1</m:t>
-                        </m:r>
-                        <m:r>
-                          <a:rPr lang="en-US" sz="2400" b="0" i="1" dirty="0" smtClean="0">
-                            <a:solidFill>
-                              <a:schemeClr val="accent6">
-                                <a:lumMod val="60000"/>
-                                <a:lumOff val="40000"/>
-                              </a:schemeClr>
-                            </a:solidFill>
-                            <a:latin typeface="Cambria Math" panose="02040503050406030204" pitchFamily="18" charset="0"/>
-                          </a:rPr>
-                          <m:t>−</m:t>
+                          <m:t>(1−</m:t>
                         </m:r>
                         <m:r>
                           <a:rPr lang="en-US" sz="2400" i="1" dirty="0">
@@ -5601,7 +5573,7 @@
         <p:spPr>
           <a:xfrm>
             <a:off x="7241458" y="3275625"/>
-            <a:ext cx="1093401" cy="640080"/>
+            <a:ext cx="1093401" cy="579120"/>
           </a:xfrm>
           <a:prstGeom prst="rect">
             <a:avLst/>
@@ -6844,7 +6816,7 @@
         </p:nvSpPr>
         <p:spPr>
           <a:xfrm>
-            <a:off x="4618757" y="2281660"/>
+            <a:off x="4565313" y="2268861"/>
             <a:ext cx="1093401" cy="640080"/>
           </a:xfrm>
           <a:prstGeom prst="rect">
@@ -8026,7 +7998,7 @@
         <p:spPr>
           <a:xfrm>
             <a:off x="297180" y="333863"/>
-            <a:ext cx="11745468" cy="5693866"/>
+            <a:ext cx="11745468" cy="6124754"/>
           </a:xfrm>
           <a:prstGeom prst="rect">
             <a:avLst/>
@@ -8091,7 +8063,43 @@
                   </a:schemeClr>
                 </a:solidFill>
               </a:rPr>
-              <a:t>Example: There are </a:t>
+              <a:t>Example: You perform 4-coin toss experiment. </a:t>
+            </a:r>
+          </a:p>
+          <a:p>
+            <a:r>
+              <a:rPr lang="en-US" sz="2800" dirty="0">
+                <a:solidFill>
+                  <a:schemeClr val="accent6">
+                    <a:lumMod val="60000"/>
+                    <a:lumOff val="40000"/>
+                  </a:schemeClr>
+                </a:solidFill>
+              </a:rPr>
+              <a:t>In how many ways can you  have 2 heads ?</a:t>
+            </a:r>
+          </a:p>
+          <a:p>
+            <a:endParaRPr lang="en-US" sz="2800" dirty="0">
+              <a:solidFill>
+                <a:schemeClr val="accent6">
+                  <a:lumMod val="60000"/>
+                  <a:lumOff val="40000"/>
+                </a:schemeClr>
+              </a:solidFill>
+            </a:endParaRPr>
+          </a:p>
+          <a:p>
+            <a:r>
+              <a:rPr lang="en-US" sz="2800" dirty="0">
+                <a:solidFill>
+                  <a:schemeClr val="accent6">
+                    <a:lumMod val="60000"/>
+                    <a:lumOff val="40000"/>
+                  </a:schemeClr>
+                </a:solidFill>
+              </a:rPr>
+              <a:t>There are </a:t>
             </a:r>
             <a:r>
               <a:rPr lang="en-US" sz="2800" b="1" dirty="0">
@@ -8187,26 +8195,6 @@
               <a:t>is given by</a:t>
             </a:r>
             <a:endParaRPr lang="en-US" sz="2800" b="1" dirty="0">
-              <a:solidFill>
-                <a:schemeClr val="accent6">
-                  <a:lumMod val="60000"/>
-                  <a:lumOff val="40000"/>
-                </a:schemeClr>
-              </a:solidFill>
-            </a:endParaRPr>
-          </a:p>
-          <a:p>
-            <a:endParaRPr lang="en-US" sz="2800" dirty="0">
-              <a:solidFill>
-                <a:schemeClr val="accent6">
-                  <a:lumMod val="60000"/>
-                  <a:lumOff val="40000"/>
-                </a:schemeClr>
-              </a:solidFill>
-            </a:endParaRPr>
-          </a:p>
-          <a:p>
-            <a:endParaRPr lang="en-US" sz="2800" dirty="0">
               <a:solidFill>
                 <a:schemeClr val="accent6">
                   <a:lumMod val="60000"/>
@@ -8292,7 +8280,7 @@
         </p:blipFill>
         <p:spPr>
           <a:xfrm>
-            <a:off x="5769802" y="4544257"/>
+            <a:off x="7077394" y="4032193"/>
             <a:ext cx="4220080" cy="839764"/>
           </a:xfrm>
           <a:prstGeom prst="rect">
